--- a/docs/Research_Paper_Capstone_Presentation.pptx
+++ b/docs/Research_Paper_Capstone_Presentation.pptx
@@ -3299,7 +3299,7 @@
       </p:sp>
       <p:sp>
         <p:nvSpPr>
-          <p:cNvPr id="138" name="Evidence-first RAG over five landmark Generative AI papers…"/>
+          <p:cNvPr id="138" name="Ask  →  Search  →  Verify  →  Cite…"/>
           <p:cNvSpPr txBox="1"/>
           <p:nvPr>
             <p:ph type="subTitle" sz="quarter" idx="1"/>
@@ -3314,16 +3314,29 @@
           <a:bodyPr/>
           <a:lstStyle/>
           <a:p>
-            <a:pPr defTabSz="479044">
-              <a:defRPr sz="3034"/>
+            <a:pPr defTabSz="268731">
+              <a:defRPr sz="1702"/>
             </a:pPr>
             <a:r>
-              <a:t>Evidence-first RAG over five landmark Generative AI papers</a:t>
-            </a:r>
-          </a:p>
-          <a:p>
-            <a:pPr defTabSz="479044">
-              <a:defRPr sz="3034"/>
+              <a:t>Ask  →  Search  →  Verify  →  Cite</a:t>
+            </a:r>
+          </a:p>
+          <a:p>
+            <a:pPr defTabSz="268731">
+              <a:defRPr sz="1702"/>
+            </a:pPr>
+          </a:p>
+          <a:p>
+            <a:pPr defTabSz="268731">
+              <a:defRPr sz="1702"/>
+            </a:pPr>
+            <a:r>
+              <a:t>Evidence-first answers across landmark Generative AI papers</a:t>
+            </a:r>
+          </a:p>
+          <a:p>
+            <a:pPr defTabSz="268731">
+              <a:defRPr sz="1702"/>
             </a:pPr>
             <a:r>
               <a:t>Analytics Vidhya · GenAI Pinnacle Capstone</a:t>
@@ -3359,7 +3372,7 @@
       </p:grpSpPr>
       <p:sp>
         <p:nvSpPr>
-          <p:cNvPr id="164" name="Quality and next steps"/>
+          <p:cNvPr id="164" name="Next steps"/>
           <p:cNvSpPr txBox="1"/>
           <p:nvPr>
             <p:ph type="title"/>
@@ -3376,14 +3389,14 @@
           <a:p>
             <a:pPr/>
             <a:r>
-              <a:t>Quality and next steps</a:t>
+              <a:t>Next steps</a:t>
             </a:r>
           </a:p>
         </p:txBody>
       </p:sp>
       <p:sp>
         <p:nvSpPr>
-          <p:cNvPr id="165" name="30-question golden set; automated coverage for ingestion, retrieval, citations, memory and refusal.…"/>
+          <p:cNvPr id="165" name="Warm neural models and run the full bake-off…"/>
           <p:cNvSpPr txBox="1"/>
           <p:nvPr>
             <p:ph type="body" idx="1"/>
@@ -3400,16 +3413,25 @@
           <a:p>
             <a:pPr/>
             <a:r>
-              <a:t>30-question golden set; automated coverage for ingestion, retrieval, citations, memory and refusal.</a:t>
-            </a:r>
-          </a:p>
-          <a:p>
-            <a:pPr/>
-          </a:p>
-          <a:p>
-            <a:pPr/>
-            <a:r>
-              <a:t>Next: warm model cache, run neural/commercial bake-off, lock the winner, add figure/table extraction.</a:t>
+              <a:t>Warm neural models and run the full bake-off</a:t>
+            </a:r>
+          </a:p>
+          <a:p>
+            <a:pPr/>
+            <a:r>
+              <a:t>Lock the winning production configuration</a:t>
+            </a:r>
+          </a:p>
+          <a:p>
+            <a:pPr/>
+            <a:r>
+              <a:t>Add figure and table extraction</a:t>
+            </a:r>
+          </a:p>
+          <a:p>
+            <a:pPr/>
+            <a:r>
+              <a:t>Deploy with managed secrets and authentication</a:t>
             </a:r>
           </a:p>
         </p:txBody>
@@ -3442,7 +3464,7 @@
       </p:grpSpPr>
       <p:sp>
         <p:nvSpPr>
-          <p:cNvPr id="140" name="Problem and goal"/>
+          <p:cNvPr id="140" name="Why this project?"/>
           <p:cNvSpPr txBox="1"/>
           <p:nvPr>
             <p:ph type="title"/>
@@ -3459,14 +3481,14 @@
           <a:p>
             <a:pPr/>
             <a:r>
-              <a:t>Problem and goal</a:t>
+              <a:t>Why this project?</a:t>
             </a:r>
           </a:p>
         </p:txBody>
       </p:sp>
       <p:sp>
         <p:nvSpPr>
-          <p:cNvPr id="141" name="Researchers need trustworthy answers across long AI papers.…"/>
+          <p:cNvPr id="141" name="Research papers are difficult to search, compare, and trust at speed.…"/>
           <p:cNvSpPr txBox="1"/>
           <p:nvPr>
             <p:ph type="body" idx="1"/>
@@ -3483,16 +3505,16 @@
           <a:p>
             <a:pPr/>
             <a:r>
-              <a:t>Researchers need trustworthy answers across long AI papers.</a:t>
-            </a:r>
-          </a:p>
-          <a:p>
-            <a:pPr/>
-          </a:p>
-          <a:p>
-            <a:pPr/>
-            <a:r>
-              <a:t>Goal: cited answers, not an ungrounded chat experience.</a:t>
+              <a:t>Research papers are difficult to search, compare, and trust at speed.</a:t>
+            </a:r>
+          </a:p>
+          <a:p>
+            <a:pPr/>
+          </a:p>
+          <a:p>
+            <a:pPr/>
+            <a:r>
+              <a:t>The goal: answer questions from primary sources — with the exact paper and page visible.</a:t>
             </a:r>
           </a:p>
         </p:txBody>
@@ -3525,7 +3547,7 @@
       </p:grpSpPr>
       <p:sp>
         <p:nvSpPr>
-          <p:cNvPr id="143" name="Corpus and requirements"/>
+          <p:cNvPr id="143" name="Scope at a glance"/>
           <p:cNvSpPr txBox="1"/>
           <p:nvPr>
             <p:ph type="title"/>
@@ -3538,22 +3560,18 @@
         </p:spPr>
         <p:txBody>
           <a:bodyPr/>
-          <a:lstStyle>
-            <a:lvl1pPr defTabSz="537463">
-              <a:defRPr sz="7360"/>
-            </a:lvl1pPr>
-          </a:lstStyle>
-          <a:p>
-            <a:pPr/>
-            <a:r>
-              <a:t>Corpus and requirements</a:t>
+          <a:lstStyle/>
+          <a:p>
+            <a:pPr/>
+            <a:r>
+              <a:t>Scope at a glance</a:t>
             </a:r>
           </a:p>
         </p:txBody>
       </p:sp>
       <p:sp>
         <p:nvSpPr>
-          <p:cNvPr id="144" name="Attention Is All You Need · GPT-4 · InstructGPT · Mistral 7B · Gemini 1.0…"/>
+          <p:cNvPr id="144" name="5 landmark papers…"/>
           <p:cNvSpPr txBox="1"/>
           <p:nvPr>
             <p:ph type="body" idx="1"/>
@@ -3570,16 +3588,25 @@
           <a:p>
             <a:pPr/>
             <a:r>
-              <a:t>Attention Is All You Need · GPT-4 · InstructGPT · Mistral 7B · Gemini 1.0</a:t>
-            </a:r>
-          </a:p>
-          <a:p>
-            <a:pPr/>
-          </a:p>
-          <a:p>
-            <a:pPr/>
-            <a:r>
-              <a:t>Covers vector indexing, open + commercial embeddings, retrieval bake-off, RAG, testing and sources.</a:t>
+              <a:t>5 landmark papers</a:t>
+            </a:r>
+          </a:p>
+          <a:p>
+            <a:pPr/>
+            <a:r>
+              <a:t>4 embedding candidates</a:t>
+            </a:r>
+          </a:p>
+          <a:p>
+            <a:pPr/>
+            <a:r>
+              <a:t>5 retrieval strategies</a:t>
+            </a:r>
+          </a:p>
+          <a:p>
+            <a:pPr/>
+            <a:r>
+              <a:t>3 ways to use the product</a:t>
             </a:r>
           </a:p>
         </p:txBody>
@@ -3612,7 +3639,7 @@
       </p:grpSpPr>
       <p:sp>
         <p:nvSpPr>
-          <p:cNvPr id="146" name="Architecture"/>
+          <p:cNvPr id="146" name="High-level overview"/>
           <p:cNvSpPr txBox="1"/>
           <p:nvPr>
             <p:ph type="title"/>
@@ -3629,14 +3656,14 @@
           <a:p>
             <a:pPr/>
             <a:r>
-              <a:t>Architecture</a:t>
+              <a:t>High-level overview</a:t>
             </a:r>
           </a:p>
         </p:txBody>
       </p:sp>
       <p:sp>
         <p:nvSpPr>
-          <p:cNvPr id="147" name="PyMuPDF → embedding provider → Chroma + BM25 → hybrid/RRF/rerank → relevance grader → grounded generator → paper/page citations…"/>
+          <p:cNvPr id="147" name="RESEARCHER QUESTION…"/>
           <p:cNvSpPr txBox="1"/>
           <p:nvPr>
             <p:ph type="body" idx="1"/>
@@ -3651,18 +3678,80 @@
           <a:bodyPr/>
           <a:lstStyle/>
           <a:p>
-            <a:pPr/>
-            <a:r>
-              <a:t>PyMuPDF → embedding provider → Chroma + BM25 → hybrid/RRF/rerank → relevance grader → grounded generator → paper/page citations</a:t>
-            </a:r>
-          </a:p>
-          <a:p>
-            <a:pPr/>
-          </a:p>
-          <a:p>
-            <a:pPr/>
-            <a:r>
-              <a:t>Streamlit, FastAPI and CLI share one core.</a:t>
+            <a:pPr marL="417830" indent="-417830" defTabSz="549148">
+              <a:spcBef>
+                <a:spcPts val="3900"/>
+              </a:spcBef>
+              <a:defRPr sz="3008"/>
+            </a:pPr>
+            <a:r>
+              <a:t>RESEARCHER QUESTION</a:t>
+            </a:r>
+          </a:p>
+          <a:p>
+            <a:pPr marL="417830" indent="-417830" defTabSz="549148">
+              <a:spcBef>
+                <a:spcPts val="3900"/>
+              </a:spcBef>
+              <a:defRPr sz="3008"/>
+            </a:pPr>
+            <a:r>
+              <a:t>↓</a:t>
+            </a:r>
+          </a:p>
+          <a:p>
+            <a:pPr marL="417830" indent="-417830" defTabSz="549148">
+              <a:spcBef>
+                <a:spcPts val="3900"/>
+              </a:spcBef>
+              <a:defRPr sz="3008"/>
+            </a:pPr>
+            <a:r>
+              <a:t>SEARCH THE FIVE-PAPER CORPUS</a:t>
+            </a:r>
+          </a:p>
+          <a:p>
+            <a:pPr marL="417830" indent="-417830" defTabSz="549148">
+              <a:spcBef>
+                <a:spcPts val="3900"/>
+              </a:spcBef>
+              <a:defRPr sz="3008"/>
+            </a:pPr>
+            <a:r>
+              <a:t>↓</a:t>
+            </a:r>
+          </a:p>
+          <a:p>
+            <a:pPr marL="417830" indent="-417830" defTabSz="549148">
+              <a:spcBef>
+                <a:spcPts val="3900"/>
+              </a:spcBef>
+              <a:defRPr sz="3008"/>
+            </a:pPr>
+            <a:r>
+              <a:t>RELEVANT EVIDENCE?</a:t>
+            </a:r>
+          </a:p>
+          <a:p>
+            <a:pPr marL="417830" indent="-417830" defTabSz="549148">
+              <a:spcBef>
+                <a:spcPts val="3900"/>
+              </a:spcBef>
+              <a:defRPr sz="3008"/>
+            </a:pPr>
+            <a:r>
+              <a:t>↓</a:t>
+            </a:r>
+          </a:p>
+          <a:p>
+            <a:pPr marL="417830" indent="-417830" defTabSz="549148">
+              <a:spcBef>
+                <a:spcPts val="3900"/>
+              </a:spcBef>
+              <a:defRPr sz="3008"/>
+            </a:pPr>
+            <a:r>
+              <a:t>CITED ANSWER  →  FOLLOW-UP QUESTION</a:t>
             </a:r>
           </a:p>
         </p:txBody>
@@ -3695,7 +3784,7 @@
       </p:grpSpPr>
       <p:sp>
         <p:nvSpPr>
-          <p:cNvPr id="149" name="Citation-safe ingestion"/>
+          <p:cNvPr id="149" name="Technical design"/>
           <p:cNvSpPr txBox="1"/>
           <p:nvPr>
             <p:ph type="title"/>
@@ -3712,14 +3801,14 @@
           <a:p>
             <a:pPr/>
             <a:r>
-              <a:t>Citation-safe ingestion</a:t>
+              <a:t>Technical design</a:t>
             </a:r>
           </a:p>
         </p:txBody>
       </p:sp>
       <p:sp>
         <p:nvSpPr>
-          <p:cNvPr id="150" name="Page-aware chunks retain paper title, page, section and chunk ID.…"/>
+          <p:cNvPr id="150" name="PDFs…"/>
           <p:cNvSpPr txBox="1"/>
           <p:nvPr>
             <p:ph type="body" idx="1"/>
@@ -3734,18 +3823,102 @@
           <a:bodyPr/>
           <a:lstStyle/>
           <a:p>
-            <a:pPr/>
-            <a:r>
-              <a:t>Page-aware chunks retain paper title, page, section and chunk ID.</a:t>
-            </a:r>
-          </a:p>
-          <a:p>
-            <a:pPr/>
-          </a:p>
-          <a:p>
-            <a:pPr/>
-            <a:r>
-              <a:t>Reference sections are excluded from answer context, making each source traceable.</a:t>
+            <a:pPr marL="315594" indent="-315594" defTabSz="414781">
+              <a:spcBef>
+                <a:spcPts val="2900"/>
+              </a:spcBef>
+              <a:defRPr sz="2272"/>
+            </a:pPr>
+            <a:r>
+              <a:t>PDFs</a:t>
+            </a:r>
+          </a:p>
+          <a:p>
+            <a:pPr marL="315594" indent="-315594" defTabSz="414781">
+              <a:spcBef>
+                <a:spcPts val="2900"/>
+              </a:spcBef>
+              <a:defRPr sz="2272"/>
+            </a:pPr>
+            <a:r>
+              <a:t>↓</a:t>
+            </a:r>
+          </a:p>
+          <a:p>
+            <a:pPr marL="315594" indent="-315594" defTabSz="414781">
+              <a:spcBef>
+                <a:spcPts val="2900"/>
+              </a:spcBef>
+              <a:defRPr sz="2272"/>
+            </a:pPr>
+            <a:r>
+              <a:t>Page-aware chunks</a:t>
+            </a:r>
+          </a:p>
+          <a:p>
+            <a:pPr marL="315594" indent="-315594" defTabSz="414781">
+              <a:spcBef>
+                <a:spcPts val="2900"/>
+              </a:spcBef>
+              <a:defRPr sz="2272"/>
+            </a:pPr>
+            <a:r>
+              <a:t>↓</a:t>
+            </a:r>
+          </a:p>
+          <a:p>
+            <a:pPr marL="315594" indent="-315594" defTabSz="414781">
+              <a:spcBef>
+                <a:spcPts val="2900"/>
+              </a:spcBef>
+              <a:defRPr sz="2272"/>
+            </a:pPr>
+            <a:r>
+              <a:t>Embeddings + BM25</a:t>
+            </a:r>
+          </a:p>
+          <a:p>
+            <a:pPr marL="315594" indent="-315594" defTabSz="414781">
+              <a:spcBef>
+                <a:spcPts val="2900"/>
+              </a:spcBef>
+              <a:defRPr sz="2272"/>
+            </a:pPr>
+            <a:r>
+              <a:t>↓</a:t>
+            </a:r>
+          </a:p>
+          <a:p>
+            <a:pPr marL="315594" indent="-315594" defTabSz="414781">
+              <a:spcBef>
+                <a:spcPts val="2900"/>
+              </a:spcBef>
+              <a:defRPr sz="2272"/>
+            </a:pPr>
+            <a:r>
+              <a:t>Retrieve + relevance check</a:t>
+            </a:r>
+          </a:p>
+          <a:p>
+            <a:pPr marL="315594" indent="-315594" defTabSz="414781">
+              <a:spcBef>
+                <a:spcPts val="2900"/>
+              </a:spcBef>
+              <a:defRPr sz="2272"/>
+            </a:pPr>
+            <a:r>
+              <a:t>↓</a:t>
+            </a:r>
+          </a:p>
+          <a:p>
+            <a:pPr marL="315594" indent="-315594" defTabSz="414781">
+              <a:spcBef>
+                <a:spcPts val="2900"/>
+              </a:spcBef>
+              <a:defRPr sz="2272"/>
+            </a:pPr>
+            <a:r>
+              <a:t>Grounded answer + source cards</a:t>
             </a:r>
           </a:p>
         </p:txBody>
@@ -3778,7 +3951,7 @@
       </p:grpSpPr>
       <p:sp>
         <p:nvSpPr>
-          <p:cNvPr id="152" name="Embedding bake-off"/>
+          <p:cNvPr id="152" name="When the corpus is not enough"/>
           <p:cNvSpPr txBox="1"/>
           <p:nvPr>
             <p:ph type="title"/>
@@ -3791,18 +3964,22 @@
         </p:spPr>
         <p:txBody>
           <a:bodyPr/>
-          <a:lstStyle/>
-          <a:p>
-            <a:pPr/>
-            <a:r>
-              <a:t>Embedding bake-off</a:t>
+          <a:lstStyle>
+            <a:lvl1pPr defTabSz="484886">
+              <a:defRPr sz="6640"/>
+            </a:lvl1pPr>
+          </a:lstStyle>
+          <a:p>
+            <a:pPr/>
+            <a:r>
+              <a:t>When the corpus is not enough</a:t>
             </a:r>
           </a:p>
         </p:txBody>
       </p:sp>
       <p:sp>
         <p:nvSpPr>
-          <p:cNvPr id="153" name="MiniLM · BGE-base · GTE-large · OpenAI text-embedding-3-small…"/>
+          <p:cNvPr id="153" name="In-corpus question…"/>
           <p:cNvSpPr txBox="1"/>
           <p:nvPr>
             <p:ph type="body" idx="1"/>
@@ -3819,16 +3996,34 @@
           <a:p>
             <a:pPr/>
             <a:r>
-              <a:t>MiniLM · BGE-base · GTE-large · OpenAI text-embedding-3-small</a:t>
-            </a:r>
-          </a:p>
-          <a:p>
-            <a:pPr/>
-          </a:p>
-          <a:p>
-            <a:pPr/>
-            <a:r>
-              <a:t>Measures Hit@5, MRR, nDCG@5, index time and query latency. Offline fallback is clearly labelled—not presented as neural results.</a:t>
+              <a:t>In-corpus question</a:t>
+            </a:r>
+          </a:p>
+          <a:p>
+            <a:pPr/>
+            <a:r>
+              <a:t>→ grounded answer with citations</a:t>
+            </a:r>
+          </a:p>
+          <a:p>
+            <a:pPr/>
+          </a:p>
+          <a:p>
+            <a:pPr/>
+            <a:r>
+              <a:t>Out-of-corpus question</a:t>
+            </a:r>
+          </a:p>
+          <a:p>
+            <a:pPr/>
+            <a:r>
+              <a:t>→ Tavily web search when configured</a:t>
+            </a:r>
+          </a:p>
+          <a:p>
+            <a:pPr/>
+            <a:r>
+              <a:t>→ transparent refusal when offline</a:t>
             </a:r>
           </a:p>
         </p:txBody>
@@ -3861,7 +4056,7 @@
       </p:grpSpPr>
       <p:sp>
         <p:nvSpPr>
-          <p:cNvPr id="155" name="Retrieval bake-off"/>
+          <p:cNvPr id="155" name="Evaluation"/>
           <p:cNvSpPr txBox="1"/>
           <p:nvPr>
             <p:ph type="title"/>
@@ -3878,14 +4073,14 @@
           <a:p>
             <a:pPr/>
             <a:r>
-              <a:t>Retrieval bake-off</a:t>
+              <a:t>Evaluation</a:t>
             </a:r>
           </a:p>
         </p:txBody>
       </p:sp>
       <p:sp>
         <p:nvSpPr>
-          <p:cNvPr id="156" name="Dense cosine baseline · BM25 · Hybrid RRF · Hybrid rerank · MMR…"/>
+          <p:cNvPr id="156" name="Compare embeddings…"/>
           <p:cNvSpPr txBox="1"/>
           <p:nvPr>
             <p:ph type="body" idx="1"/>
@@ -3900,18 +4095,74 @@
           <a:bodyPr/>
           <a:lstStyle/>
           <a:p>
-            <a:pPr/>
-            <a:r>
-              <a:t>Dense cosine baseline · BM25 · Hybrid RRF · Hybrid rerank · MMR</a:t>
-            </a:r>
-          </a:p>
-          <a:p>
-            <a:pPr/>
-          </a:p>
-          <a:p>
-            <a:pPr/>
-            <a:r>
-              <a:t>Hybrid rerank is the production candidate: semantic recall plus technical-term precision.</a:t>
+            <a:pPr marL="413384" indent="-413384" defTabSz="543305">
+              <a:spcBef>
+                <a:spcPts val="3900"/>
+              </a:spcBef>
+              <a:defRPr sz="2976"/>
+            </a:pPr>
+            <a:r>
+              <a:t>Compare embeddings</a:t>
+            </a:r>
+          </a:p>
+          <a:p>
+            <a:pPr marL="413384" indent="-413384" defTabSz="543305">
+              <a:spcBef>
+                <a:spcPts val="3900"/>
+              </a:spcBef>
+              <a:defRPr sz="2976"/>
+            </a:pPr>
+            <a:r>
+              <a:t>MiniLM · BGE-base · GTE-large · OpenAI</a:t>
+            </a:r>
+          </a:p>
+          <a:p>
+            <a:pPr marL="413384" indent="-413384" defTabSz="543305">
+              <a:spcBef>
+                <a:spcPts val="3900"/>
+              </a:spcBef>
+              <a:defRPr sz="2976"/>
+            </a:pPr>
+          </a:p>
+          <a:p>
+            <a:pPr marL="413384" indent="-413384" defTabSz="543305">
+              <a:spcBef>
+                <a:spcPts val="3900"/>
+              </a:spcBef>
+              <a:defRPr sz="2976"/>
+            </a:pPr>
+            <a:r>
+              <a:t>Compare retrieval</a:t>
+            </a:r>
+          </a:p>
+          <a:p>
+            <a:pPr marL="413384" indent="-413384" defTabSz="543305">
+              <a:spcBef>
+                <a:spcPts val="3900"/>
+              </a:spcBef>
+              <a:defRPr sz="2976"/>
+            </a:pPr>
+            <a:r>
+              <a:t>Dense · BM25 · Hybrid · Rerank · MMR</a:t>
+            </a:r>
+          </a:p>
+          <a:p>
+            <a:pPr marL="413384" indent="-413384" defTabSz="543305">
+              <a:spcBef>
+                <a:spcPts val="3900"/>
+              </a:spcBef>
+              <a:defRPr sz="2976"/>
+            </a:pPr>
+          </a:p>
+          <a:p>
+            <a:pPr marL="413384" indent="-413384" defTabSz="543305">
+              <a:spcBef>
+                <a:spcPts val="3900"/>
+              </a:spcBef>
+              <a:defRPr sz="2976"/>
+            </a:pPr>
+            <a:r>
+              <a:t>Score with Hit@5 · MRR · nDCG · latency</a:t>
             </a:r>
           </a:p>
         </p:txBody>
@@ -3944,7 +4195,7 @@
       </p:grpSpPr>
       <p:sp>
         <p:nvSpPr>
-          <p:cNvPr id="158" name="Corrective and conversational RAG"/>
+          <p:cNvPr id="158" name="Product experience"/>
           <p:cNvSpPr txBox="1"/>
           <p:nvPr>
             <p:ph type="title"/>
@@ -3957,22 +4208,18 @@
         </p:spPr>
         <p:txBody>
           <a:bodyPr/>
-          <a:lstStyle>
-            <a:lvl1pPr defTabSz="484886">
-              <a:defRPr sz="6640"/>
-            </a:lvl1pPr>
-          </a:lstStyle>
-          <a:p>
-            <a:pPr/>
-            <a:r>
-              <a:t>Corrective and conversational RAG</a:t>
+          <a:lstStyle/>
+          <a:p>
+            <a:pPr/>
+            <a:r>
+              <a:t>Product experience</a:t>
             </a:r>
           </a:p>
         </p:txBody>
       </p:sp>
       <p:sp>
         <p:nvSpPr>
-          <p:cNvPr id="159" name="Thread-isolated history resolves follow-ups.…"/>
+          <p:cNvPr id="159" name="Streamlit workspace…"/>
           <p:cNvSpPr txBox="1"/>
           <p:nvPr>
             <p:ph type="body" idx="1"/>
@@ -3987,18 +4234,85 @@
           <a:bodyPr/>
           <a:lstStyle/>
           <a:p>
-            <a:pPr/>
-            <a:r>
-              <a:t>Thread-isolated history resolves follow-ups.</a:t>
-            </a:r>
-          </a:p>
-          <a:p>
-            <a:pPr/>
-          </a:p>
-          <a:p>
-            <a:pPr/>
-            <a:r>
-              <a:t>The relevance grader uses Tavily when configured or transparently refuses out-of-corpus questions.</a:t>
+            <a:pPr marL="355600" indent="-355600" defTabSz="467359">
+              <a:spcBef>
+                <a:spcPts val="3300"/>
+              </a:spcBef>
+              <a:defRPr sz="2560"/>
+            </a:pPr>
+            <a:r>
+              <a:t>Streamlit workspace</a:t>
+            </a:r>
+          </a:p>
+          <a:p>
+            <a:pPr marL="355600" indent="-355600" defTabSz="467359">
+              <a:spcBef>
+                <a:spcPts val="3300"/>
+              </a:spcBef>
+              <a:defRPr sz="2560"/>
+            </a:pPr>
+            <a:r>
+              <a:t>Research chat · Corpus browser · Evaluation tab</a:t>
+            </a:r>
+          </a:p>
+          <a:p>
+            <a:pPr marL="355600" indent="-355600" defTabSz="467359">
+              <a:spcBef>
+                <a:spcPts val="3300"/>
+              </a:spcBef>
+              <a:defRPr sz="2560"/>
+            </a:pPr>
+          </a:p>
+          <a:p>
+            <a:pPr marL="355600" indent="-355600" defTabSz="467359">
+              <a:spcBef>
+                <a:spcPts val="3300"/>
+              </a:spcBef>
+              <a:defRPr sz="2560"/>
+            </a:pPr>
+            <a:r>
+              <a:t>FastAPI</a:t>
+            </a:r>
+          </a:p>
+          <a:p>
+            <a:pPr marL="355600" indent="-355600" defTabSz="467359">
+              <a:spcBef>
+                <a:spcPts val="3300"/>
+              </a:spcBef>
+              <a:defRPr sz="2560"/>
+            </a:pPr>
+            <a:r>
+              <a:t>Cited answers for applications</a:t>
+            </a:r>
+          </a:p>
+          <a:p>
+            <a:pPr marL="355600" indent="-355600" defTabSz="467359">
+              <a:spcBef>
+                <a:spcPts val="3300"/>
+              </a:spcBef>
+              <a:defRPr sz="2560"/>
+            </a:pPr>
+          </a:p>
+          <a:p>
+            <a:pPr marL="355600" indent="-355600" defTabSz="467359">
+              <a:spcBef>
+                <a:spcPts val="3300"/>
+              </a:spcBef>
+              <a:defRPr sz="2560"/>
+            </a:pPr>
+            <a:r>
+              <a:t>CLI</a:t>
+            </a:r>
+          </a:p>
+          <a:p>
+            <a:pPr marL="355600" indent="-355600" defTabSz="467359">
+              <a:spcBef>
+                <a:spcPts val="3300"/>
+              </a:spcBef>
+              <a:defRPr sz="2560"/>
+            </a:pPr>
+            <a:r>
+              <a:t>Quick terminal research</a:t>
             </a:r>
           </a:p>
         </p:txBody>
@@ -4031,7 +4345,7 @@
       </p:grpSpPr>
       <p:sp>
         <p:nvSpPr>
-          <p:cNvPr id="161" name="Product demonstration"/>
+          <p:cNvPr id="161" name="What I learned"/>
           <p:cNvSpPr txBox="1"/>
           <p:nvPr>
             <p:ph type="title"/>
@@ -4048,14 +4362,14 @@
           <a:p>
             <a:pPr/>
             <a:r>
-              <a:t>Product demonstration</a:t>
+              <a:t>What I learned</a:t>
             </a:r>
           </a:p>
         </p:txBody>
       </p:sp>
       <p:sp>
         <p:nvSpPr>
-          <p:cNvPr id="162" name="Streamlit chat: answers, page citations, source excerpts, provenance, scores and latency.…"/>
+          <p:cNvPr id="162" name="Retrieval quality is measurable — not guesswork.…"/>
           <p:cNvSpPr txBox="1"/>
           <p:nvPr>
             <p:ph type="body" idx="1"/>
@@ -4070,18 +4384,71 @@
           <a:bodyPr/>
           <a:lstStyle/>
           <a:p>
-            <a:pPr/>
-            <a:r>
-              <a:t>Streamlit chat: answers, page citations, source excerpts, provenance, scores and latency.</a:t>
-            </a:r>
-          </a:p>
-          <a:p>
-            <a:pPr/>
-          </a:p>
-          <a:p>
-            <a:pPr/>
-            <a:r>
-              <a:t>FastAPI: /health, /api/v1/ask, /api/v1/sources. CLI supports terminal demonstrations.</a:t>
+            <a:pPr marL="413384" indent="-413384" defTabSz="543305">
+              <a:spcBef>
+                <a:spcPts val="3900"/>
+              </a:spcBef>
+              <a:defRPr sz="2976"/>
+            </a:pPr>
+            <a:r>
+              <a:t>Retrieval quality is measurable — not guesswork.</a:t>
+            </a:r>
+          </a:p>
+          <a:p>
+            <a:pPr marL="413384" indent="-413384" defTabSz="543305">
+              <a:spcBef>
+                <a:spcPts val="3900"/>
+              </a:spcBef>
+              <a:defRPr sz="2976"/>
+            </a:pPr>
+          </a:p>
+          <a:p>
+            <a:pPr marL="413384" indent="-413384" defTabSz="543305">
+              <a:spcBef>
+                <a:spcPts val="3900"/>
+              </a:spcBef>
+              <a:defRPr sz="2976"/>
+            </a:pPr>
+            <a:r>
+              <a:t>Citations make RAG answers auditable.</a:t>
+            </a:r>
+          </a:p>
+          <a:p>
+            <a:pPr marL="413384" indent="-413384" defTabSz="543305">
+              <a:spcBef>
+                <a:spcPts val="3900"/>
+              </a:spcBef>
+              <a:defRPr sz="2976"/>
+            </a:pPr>
+          </a:p>
+          <a:p>
+            <a:pPr marL="413384" indent="-413384" defTabSz="543305">
+              <a:spcBef>
+                <a:spcPts val="3900"/>
+              </a:spcBef>
+              <a:defRPr sz="2976"/>
+            </a:pPr>
+            <a:r>
+              <a:t>A clear fallback is safer than a confident hallucination.</a:t>
+            </a:r>
+          </a:p>
+          <a:p>
+            <a:pPr marL="413384" indent="-413384" defTabSz="543305">
+              <a:spcBef>
+                <a:spcPts val="3900"/>
+              </a:spcBef>
+              <a:defRPr sz="2976"/>
+            </a:pPr>
+          </a:p>
+          <a:p>
+            <a:pPr marL="413384" indent="-413384" defTabSz="543305">
+              <a:spcBef>
+                <a:spcPts val="3900"/>
+              </a:spcBef>
+              <a:defRPr sz="2976"/>
+            </a:pPr>
+            <a:r>
+              <a:t>Conversation memory needs explicit thread isolation.</a:t>
             </a:r>
           </a:p>
         </p:txBody>
